--- a/02 Strategy/Patterns - Strategy.pptx
+++ b/02 Strategy/Patterns - Strategy.pptx
@@ -346,7 +346,7 @@
           <a:p>
             <a:fld id="{8A6E8EB0-8888-4A4E-94F3-14D8E5038AB6}" type="datetimeFigureOut">
               <a:rPr lang="en-US" smtClean="0"/>
-              <a:t>9/4/2024</a:t>
+              <a:t>9/2/26</a:t>
             </a:fld>
             <a:endParaRPr lang="en-US" dirty="0"/>
           </a:p>
